--- a/마켓센싱_리포트_AI전환_추진계획_에스원양식.pptx
+++ b/마켓센싱_리포트_AI전환_추진계획_에스원양식.pptx
@@ -5405,7 +5405,7 @@
                 <a:ea typeface="SamsungOneKorean 400"/>
                 <a:cs typeface="SamsungOneKorean 400"/>
               </a:rPr>
-              <a:t>정보수집(L1) 정합</a:t>
+              <a:t>정보수집 계층 정합</a:t>
             </a:r>
           </a:p>
         </p:txBody>
@@ -8825,7 +8825,7 @@
                 <a:ea typeface="SamsungOneKorean 400"/>
                 <a:cs typeface="SamsungOneKorean 400"/>
               </a:rPr>
-              <a:t>L1 수집 자동화 시범 구축, 4개 관점 에이전트 프로토타입 설계</a:t>
+              <a:t>수집 계층 자동화 시범 구축, 4개 관점 에이전트 프로토타입 설계</a:t>
             </a:r>
           </a:p>
         </p:txBody>
@@ -11381,7 +11381,7 @@
                 <a:ea typeface="SamsungOneKorean 400"/>
                 <a:cs typeface="SamsungOneKorean 400"/>
               </a:rPr>
-              <a:t>L1 수집 자동화, 관점 설계</a:t>
+              <a:t>수집 계층 자동화, 관점 설계</a:t>
             </a:r>
           </a:p>
         </p:txBody>
@@ -12253,7 +12253,7 @@
                 <a:ea typeface="SamsungOneKorean 400"/>
                 <a:cs typeface="SamsungOneKorean 400"/>
               </a:rPr>
-              <a:t>정식운영 전환·L5 학습 루프 데이터</a:t>
+              <a:t>정식운영 전환·학습 계층 루프 데이터</a:t>
             </a:r>
           </a:p>
         </p:txBody>
